--- a/報告/114下期中報告.pptx
+++ b/報告/114下期中報告.pptx
@@ -5,10 +5,10 @@
     <p:sldMasterId id="2147483666" r:id="rId4"/>
   </p:sldMasterIdLst>
   <p:notesMasterIdLst>
-    <p:notesMasterId r:id="rId19"/>
+    <p:notesMasterId r:id="rId20"/>
   </p:notesMasterIdLst>
   <p:handoutMasterIdLst>
-    <p:handoutMasterId r:id="rId20"/>
+    <p:handoutMasterId r:id="rId21"/>
   </p:handoutMasterIdLst>
   <p:sldIdLst>
     <p:sldId id="256" r:id="rId5"/>
@@ -25,6 +25,7 @@
     <p:sldId id="280" r:id="rId16"/>
     <p:sldId id="287" r:id="rId17"/>
     <p:sldId id="278" r:id="rId18"/>
+    <p:sldId id="290" r:id="rId19"/>
   </p:sldIdLst>
   <p:sldSz cx="9144000" cy="6858000" type="screen4x3"/>
   <p:notesSz cx="9144000" cy="6858000"/>
@@ -6177,7 +6178,7 @@
                 <a:latin typeface="Microsoft JhengHei UI" panose="020B0604030504040204" pitchFamily="34" charset="-120"/>
                 <a:ea typeface="Microsoft JhengHei UI" panose="020B0604030504040204" pitchFamily="34" charset="-120"/>
               </a:rPr>
-              <a:t>2026/4/8</a:t>
+              <a:t>2026/4/17</a:t>
             </a:fld>
             <a:endParaRPr lang="zh-TW" altLang="en-US">
               <a:latin typeface="Microsoft JhengHei UI" panose="020B0604030504040204" pitchFamily="34" charset="-120"/>
@@ -6375,7 +6376,7 @@
           <a:p>
             <a:fld id="{106E7358-DB18-48DD-91BC-D4D36CB91577}" type="datetime1">
               <a:rPr lang="zh-TW" altLang="en-US" noProof="0" smtClean="0"/>
-              <a:t>2026/4/8</a:t>
+              <a:t>2026/4/17</a:t>
             </a:fld>
             <a:endParaRPr lang="zh-TW" altLang="en-US" noProof="0"/>
           </a:p>
@@ -32966,6 +32967,146 @@
     <p:extLst>
       <p:ext uri="{BB962C8B-B14F-4D97-AF65-F5344CB8AC3E}">
         <p14:creationId xmlns:p14="http://schemas.microsoft.com/office/powerpoint/2010/main" val="346529993"/>
+      </p:ext>
+    </p:extLst>
+  </p:cSld>
+  <p:clrMapOvr>
+    <a:masterClrMapping/>
+  </p:clrMapOvr>
+</p:sld>
+</file>
+
+<file path=ppt/slides/slide15.xml><?xml version="1.0" encoding="utf-8"?>
+<p:sld xmlns:a="http://schemas.openxmlformats.org/drawingml/2006/main" xmlns:r="http://schemas.openxmlformats.org/officeDocument/2006/relationships" xmlns:p="http://schemas.openxmlformats.org/presentationml/2006/main">
+  <p:cSld>
+    <p:spTree>
+      <p:nvGrpSpPr>
+        <p:cNvPr id="1" name=""/>
+        <p:cNvGrpSpPr/>
+        <p:nvPr/>
+      </p:nvGrpSpPr>
+      <p:grpSpPr>
+        <a:xfrm>
+          <a:off x="0" y="0"/>
+          <a:ext cx="0" cy="0"/>
+          <a:chOff x="0" y="0"/>
+          <a:chExt cx="0" cy="0"/>
+        </a:xfrm>
+      </p:grpSpPr>
+      <p:pic>
+        <p:nvPicPr>
+          <p:cNvPr id="6" name="圖片 5">
+            <a:extLst>
+              <a:ext uri="{FF2B5EF4-FFF2-40B4-BE49-F238E27FC236}">
+                <a16:creationId xmlns:a16="http://schemas.microsoft.com/office/drawing/2014/main" id="{E1E674D0-5969-BFC5-78CC-3B015989515C}"/>
+              </a:ext>
+            </a:extLst>
+          </p:cNvPr>
+          <p:cNvPicPr>
+            <a:picLocks noChangeAspect="1"/>
+          </p:cNvPicPr>
+          <p:nvPr/>
+        </p:nvPicPr>
+        <p:blipFill>
+          <a:blip r:embed="rId2"/>
+          <a:srcRect t="5205" r="-1" b="4288"/>
+          <a:stretch>
+            <a:fillRect/>
+          </a:stretch>
+        </p:blipFill>
+        <p:spPr>
+          <a:xfrm>
+            <a:off x="0" y="1877257"/>
+            <a:ext cx="4572000" cy="3103483"/>
+          </a:xfrm>
+          <a:prstGeom prst="rect">
+            <a:avLst/>
+          </a:prstGeom>
+          <a:noFill/>
+        </p:spPr>
+      </p:pic>
+      <p:pic>
+        <p:nvPicPr>
+          <p:cNvPr id="8" name="圖片 7">
+            <a:extLst>
+              <a:ext uri="{FF2B5EF4-FFF2-40B4-BE49-F238E27FC236}">
+                <a16:creationId xmlns:a16="http://schemas.microsoft.com/office/drawing/2014/main" id="{D97052CD-BD7A-0B71-E145-984078944935}"/>
+              </a:ext>
+            </a:extLst>
+          </p:cNvPr>
+          <p:cNvPicPr>
+            <a:picLocks noChangeAspect="1"/>
+          </p:cNvPicPr>
+          <p:nvPr/>
+        </p:nvPicPr>
+        <p:blipFill>
+          <a:blip r:embed="rId3"/>
+          <a:srcRect t="2779" r="-4" b="7154"/>
+          <a:stretch>
+            <a:fillRect/>
+          </a:stretch>
+        </p:blipFill>
+        <p:spPr>
+          <a:xfrm>
+            <a:off x="4572000" y="1884863"/>
+            <a:ext cx="4572000" cy="3088273"/>
+          </a:xfrm>
+          <a:prstGeom prst="rect">
+            <a:avLst/>
+          </a:prstGeom>
+          <a:noFill/>
+        </p:spPr>
+      </p:pic>
+      <p:sp>
+        <p:nvSpPr>
+          <p:cNvPr id="4" name="投影片編號版面配置區 3">
+            <a:extLst>
+              <a:ext uri="{FF2B5EF4-FFF2-40B4-BE49-F238E27FC236}">
+                <a16:creationId xmlns:a16="http://schemas.microsoft.com/office/drawing/2014/main" id="{17D4E0D8-85CE-AC9F-282B-03AFA5883FA3}"/>
+              </a:ext>
+            </a:extLst>
+          </p:cNvPr>
+          <p:cNvSpPr>
+            <a:spLocks noGrp="1"/>
+          </p:cNvSpPr>
+          <p:nvPr>
+            <p:ph type="sldNum" sz="quarter" idx="12"/>
+          </p:nvPr>
+        </p:nvSpPr>
+        <p:spPr>
+          <a:xfrm>
+            <a:off x="6457950" y="6356357"/>
+            <a:ext cx="2057400" cy="365125"/>
+          </a:xfrm>
+        </p:spPr>
+        <p:txBody>
+          <a:bodyPr anchor="ctr">
+            <a:normAutofit/>
+          </a:bodyPr>
+          <a:lstStyle/>
+          <a:p>
+            <a:pPr>
+              <a:spcAft>
+                <a:spcPts val="600"/>
+              </a:spcAft>
+            </a:pPr>
+            <a:fld id="{B5CEABB6-07DC-46E8-9B57-56EC44A396E5}" type="slidenum">
+              <a:rPr lang="en-US" altLang="zh-TW" noProof="0" smtClean="0"/>
+              <a:pPr>
+                <a:spcAft>
+                  <a:spcPts val="600"/>
+                </a:spcAft>
+              </a:pPr>
+              <a:t>15</a:t>
+            </a:fld>
+            <a:endParaRPr lang="zh-TW" altLang="en-US" noProof="0"/>
+          </a:p>
+        </p:txBody>
+      </p:sp>
+    </p:spTree>
+    <p:extLst>
+      <p:ext uri="{BB962C8B-B14F-4D97-AF65-F5344CB8AC3E}">
+        <p14:creationId xmlns:p14="http://schemas.microsoft.com/office/powerpoint/2010/main" val="3635361224"/>
       </p:ext>
     </p:extLst>
   </p:cSld>
@@ -37395,6 +37536,25 @@
 </file>
 
 <file path=customXml/item1.xml><?xml version="1.0" encoding="utf-8"?>
+<p:properties xmlns:p="http://schemas.microsoft.com/office/2006/metadata/properties" xmlns:xsi="http://www.w3.org/2001/XMLSchema-instance" xmlns:pc="http://schemas.microsoft.com/office/infopath/2007/PartnerControls">
+  <documentManagement>
+    <_ip_UnifiedCompliancePolicyUIAction xmlns="http://schemas.microsoft.com/sharepoint/v3" xsi:nil="true"/>
+    <Image xmlns="71af3243-3dd4-4a8d-8c0d-dd76da1f02a5">
+      <Url xsi:nil="true"/>
+      <Description xsi:nil="true"/>
+    </Image>
+    <Status xmlns="71af3243-3dd4-4a8d-8c0d-dd76da1f02a5">Not started</Status>
+    <_ip_UnifiedCompliancePolicyProperties xmlns="http://schemas.microsoft.com/sharepoint/v3" xsi:nil="true"/>
+    <ImageTagsTaxHTField xmlns="71af3243-3dd4-4a8d-8c0d-dd76da1f02a5">
+      <Terms xmlns="http://schemas.microsoft.com/office/infopath/2007/PartnerControls"/>
+    </ImageTagsTaxHTField>
+    <TaxCatchAll xmlns="230e9df3-be65-4c73-a93b-d1236ebd677e"/>
+    <MediaServiceKeyPoints xmlns="71af3243-3dd4-4a8d-8c0d-dd76da1f02a5" xsi:nil="true"/>
+  </documentManagement>
+</p:properties>
+</file>
+
+<file path=customXml/item2.xml><?xml version="1.0" encoding="utf-8"?>
 <ct:contentTypeSchema xmlns:ct="http://schemas.microsoft.com/office/2006/metadata/contentType" xmlns:ma="http://schemas.microsoft.com/office/2006/metadata/properties/metaAttributes" ct:_="" ma:_="" ma:contentTypeName="Document" ma:contentTypeID="0x01010079F111ED35F8CC479449609E8A0923A6" ma:contentTypeVersion="20" ma:contentTypeDescription="Create a new document." ma:contentTypeScope="" ma:versionID="1267097ee5f5874adfcc408041ae252e">
   <xsd:schema xmlns:xsd="http://www.w3.org/2001/XMLSchema" xmlns:xs="http://www.w3.org/2001/XMLSchema" xmlns:p="http://schemas.microsoft.com/office/2006/metadata/properties" xmlns:ns1="http://schemas.microsoft.com/sharepoint/v3" xmlns:ns2="71af3243-3dd4-4a8d-8c0d-dd76da1f02a5" xmlns:ns3="16c05727-aa75-4e4a-9b5f-8a80a1165891" xmlns:ns4="230e9df3-be65-4c73-a93b-d1236ebd677e" targetNamespace="http://schemas.microsoft.com/office/2006/metadata/properties" ma:root="true" ma:fieldsID="395891a93df65b14727750f2c06c306c" ns1:_="" ns2:_="" ns3:_="" ns4:_="">
     <xsd:import namespace="http://schemas.microsoft.com/sharepoint/v3"/>
@@ -37670,25 +37830,6 @@
 </ct:contentTypeSchema>
 </file>
 
-<file path=customXml/item2.xml><?xml version="1.0" encoding="utf-8"?>
-<p:properties xmlns:p="http://schemas.microsoft.com/office/2006/metadata/properties" xmlns:xsi="http://www.w3.org/2001/XMLSchema-instance" xmlns:pc="http://schemas.microsoft.com/office/infopath/2007/PartnerControls">
-  <documentManagement>
-    <_ip_UnifiedCompliancePolicyUIAction xmlns="http://schemas.microsoft.com/sharepoint/v3" xsi:nil="true"/>
-    <Image xmlns="71af3243-3dd4-4a8d-8c0d-dd76da1f02a5">
-      <Url xsi:nil="true"/>
-      <Description xsi:nil="true"/>
-    </Image>
-    <Status xmlns="71af3243-3dd4-4a8d-8c0d-dd76da1f02a5">Not started</Status>
-    <_ip_UnifiedCompliancePolicyProperties xmlns="http://schemas.microsoft.com/sharepoint/v3" xsi:nil="true"/>
-    <ImageTagsTaxHTField xmlns="71af3243-3dd4-4a8d-8c0d-dd76da1f02a5">
-      <Terms xmlns="http://schemas.microsoft.com/office/infopath/2007/PartnerControls"/>
-    </ImageTagsTaxHTField>
-    <TaxCatchAll xmlns="230e9df3-be65-4c73-a93b-d1236ebd677e"/>
-    <MediaServiceKeyPoints xmlns="71af3243-3dd4-4a8d-8c0d-dd76da1f02a5" xsi:nil="true"/>
-  </documentManagement>
-</p:properties>
-</file>
-
 <file path=customXml/item3.xml><?xml version="1.0" encoding="utf-8"?>
 <?mso-contentType ?>
 <FormTemplates xmlns="http://schemas.microsoft.com/sharepoint/v3/contenttype/forms">
@@ -37699,6 +37840,25 @@
 </file>
 
 <file path=customXml/itemProps1.xml><?xml version="1.0" encoding="utf-8"?>
+<ds:datastoreItem xmlns:ds="http://schemas.openxmlformats.org/officeDocument/2006/customXml" ds:itemID="{B5BA3906-9696-4247-AC0D-DD5C26B2A70A}">
+  <ds:schemaRefs>
+    <ds:schemaRef ds:uri="http://www.w3.org/XML/1998/namespace"/>
+    <ds:schemaRef ds:uri="http://schemas.microsoft.com/office/2006/documentManagement/types"/>
+    <ds:schemaRef ds:uri="http://purl.org/dc/terms/"/>
+    <ds:schemaRef ds:uri="71af3243-3dd4-4a8d-8c0d-dd76da1f02a5"/>
+    <ds:schemaRef ds:uri="http://purl.org/dc/dcmitype/"/>
+    <ds:schemaRef ds:uri="http://schemas.microsoft.com/office/infopath/2007/PartnerControls"/>
+    <ds:schemaRef ds:uri="http://purl.org/dc/elements/1.1/"/>
+    <ds:schemaRef ds:uri="http://schemas.openxmlformats.org/package/2006/metadata/core-properties"/>
+    <ds:schemaRef ds:uri="230e9df3-be65-4c73-a93b-d1236ebd677e"/>
+    <ds:schemaRef ds:uri="16c05727-aa75-4e4a-9b5f-8a80a1165891"/>
+    <ds:schemaRef ds:uri="http://schemas.microsoft.com/sharepoint/v3"/>
+    <ds:schemaRef ds:uri="http://schemas.microsoft.com/office/2006/metadata/properties"/>
+  </ds:schemaRefs>
+</ds:datastoreItem>
+</file>
+
+<file path=customXml/itemProps2.xml><?xml version="1.0" encoding="utf-8"?>
 <ds:datastoreItem xmlns:ds="http://schemas.openxmlformats.org/officeDocument/2006/customXml" ds:itemID="{01E84A1C-2814-43A7-9448-348326113A45}">
   <ds:schemaRefs>
     <ds:schemaRef ds:uri="http://schemas.microsoft.com/office/2006/metadata/contentType"/>
@@ -37719,25 +37879,6 @@
 </ds:datastoreItem>
 </file>
 
-<file path=customXml/itemProps2.xml><?xml version="1.0" encoding="utf-8"?>
-<ds:datastoreItem xmlns:ds="http://schemas.openxmlformats.org/officeDocument/2006/customXml" ds:itemID="{B5BA3906-9696-4247-AC0D-DD5C26B2A70A}">
-  <ds:schemaRefs>
-    <ds:schemaRef ds:uri="http://www.w3.org/XML/1998/namespace"/>
-    <ds:schemaRef ds:uri="http://schemas.microsoft.com/office/2006/documentManagement/types"/>
-    <ds:schemaRef ds:uri="http://purl.org/dc/terms/"/>
-    <ds:schemaRef ds:uri="71af3243-3dd4-4a8d-8c0d-dd76da1f02a5"/>
-    <ds:schemaRef ds:uri="http://purl.org/dc/dcmitype/"/>
-    <ds:schemaRef ds:uri="http://schemas.microsoft.com/office/infopath/2007/PartnerControls"/>
-    <ds:schemaRef ds:uri="http://purl.org/dc/elements/1.1/"/>
-    <ds:schemaRef ds:uri="http://schemas.openxmlformats.org/package/2006/metadata/core-properties"/>
-    <ds:schemaRef ds:uri="230e9df3-be65-4c73-a93b-d1236ebd677e"/>
-    <ds:schemaRef ds:uri="16c05727-aa75-4e4a-9b5f-8a80a1165891"/>
-    <ds:schemaRef ds:uri="http://schemas.microsoft.com/sharepoint/v3"/>
-    <ds:schemaRef ds:uri="http://schemas.microsoft.com/office/2006/metadata/properties"/>
-  </ds:schemaRefs>
-</ds:datastoreItem>
-</file>
-
 <file path=customXml/itemProps3.xml><?xml version="1.0" encoding="utf-8"?>
 <ds:datastoreItem xmlns:ds="http://schemas.openxmlformats.org/officeDocument/2006/customXml" ds:itemID="{2D446390-8521-40A2-A462-EA068123BED9}">
   <ds:schemaRefs>
